--- a/Защита.pptx
+++ b/Защита.pptx
@@ -2367,14 +2367,14 @@
           <p:nvPr>
             <p:extLst>
               <p:ext uri="{D42A27DB-BD31-4B8C-83A1-F6EECF244321}">
-                <p14:modId xmlns:p14="http://schemas.microsoft.com/office/powerpoint/2010/main" val="3964191583"/>
+                <p14:modId xmlns:p14="http://schemas.microsoft.com/office/powerpoint/2010/main" val="2118587198"/>
               </p:ext>
             </p:extLst>
           </p:nvPr>
         </p:nvGraphicFramePr>
         <p:xfrm>
           <a:off x="661475" y="3308846"/>
-          <a:ext cx="10868745" cy="1285050"/>
+          <a:ext cx="10868745" cy="1294940"/>
         </p:xfrm>
         <a:graphic>
           <a:graphicData uri="http://schemas.openxmlformats.org/drawingml/2006/table">
@@ -2745,7 +2745,7 @@
                         <a:buNone/>
                       </a:pPr>
                       <a:r>
-                        <a:rPr lang="en-US" sz="1050" kern="0" spc="-21">
+                        <a:rPr lang="en-US" sz="1050" kern="0" spc="-21" dirty="0">
                           <a:solidFill>
                             <a:srgbClr val="272525"/>
                           </a:solidFill>
@@ -2817,15 +2817,15 @@
                         <a:buNone/>
                       </a:pPr>
                       <a:r>
-                        <a:rPr lang="en-US" sz="1050" kern="0" spc="-21" dirty="0">
+                        <a:rPr lang="ru-RU" sz="1050" kern="0" spc="-21" dirty="0">
                           <a:solidFill>
                             <a:srgbClr val="272525"/>
                           </a:solidFill>
                           <a:latin typeface="Inter" pitchFamily="34" charset="0"/>
                           <a:ea typeface="Inter" pitchFamily="34" charset="-122"/>
-                          <a:cs typeface="Inter" pitchFamily="34" charset="-120"/>
+                          <a:cs typeface="Inter" charset="0"/>
                         </a:rPr>
-                        <a:t>[ПРОПУСК]</a:t>
+                        <a:t>УК</a:t>
                       </a:r>
                       <a:endParaRPr lang="en-US" sz="1050" dirty="0">
                         <a:latin typeface="Inter" charset="0"/>
@@ -2882,15 +2882,12 @@
                         <a:buNone/>
                       </a:pPr>
                       <a:r>
-                        <a:rPr lang="en-US" sz="1050" kern="0" spc="-21" dirty="0">
-                          <a:solidFill>
-                            <a:srgbClr val="272525"/>
-                          </a:solidFill>
-                          <a:latin typeface="Inter" pitchFamily="34" charset="0"/>
-                          <a:ea typeface="Inter" pitchFamily="34" charset="-122"/>
-                          <a:cs typeface="Inter" pitchFamily="34" charset="-120"/>
+                        <a:rPr lang="ru-RU" sz="1050" dirty="0">
+                          <a:latin typeface="Inter" charset="0"/>
+                          <a:ea typeface="Inter" charset="0"/>
+                          <a:cs typeface="Inter" charset="0"/>
                         </a:rPr>
-                        <a:t>[ПРОПУСК]</a:t>
+                        <a:t>На странице профиля можно стать УК (потом это как то нужно обратить в процесс)</a:t>
                       </a:r>
                       <a:endParaRPr lang="en-US" sz="1050" dirty="0">
                         <a:latin typeface="Inter" charset="0"/>
@@ -2946,17 +2943,6 @@
                       <a:pPr marL="0" indent="0" algn="l">
                         <a:buNone/>
                       </a:pPr>
-                      <a:r>
-                        <a:rPr lang="en-US" sz="1050" kern="0" spc="-21" dirty="0">
-                          <a:solidFill>
-                            <a:srgbClr val="272525"/>
-                          </a:solidFill>
-                          <a:latin typeface="Inter" pitchFamily="34" charset="0"/>
-                          <a:ea typeface="Inter" pitchFamily="34" charset="-122"/>
-                          <a:cs typeface="Inter" pitchFamily="34" charset="-120"/>
-                        </a:rPr>
-                        <a:t>[ПРОПУСК]</a:t>
-                      </a:r>
                       <a:endParaRPr lang="en-US" sz="1050" dirty="0">
                         <a:latin typeface="Inter" charset="0"/>
                         <a:ea typeface="Inter" charset="0"/>
@@ -3019,15 +3005,12 @@
                         <a:buNone/>
                       </a:pPr>
                       <a:r>
-                        <a:rPr lang="en-US" sz="1050" kern="0" spc="-21" dirty="0">
-                          <a:solidFill>
-                            <a:srgbClr val="272525"/>
-                          </a:solidFill>
-                          <a:latin typeface="Inter" pitchFamily="34" charset="0"/>
-                          <a:ea typeface="Inter" pitchFamily="34" charset="-122"/>
-                          <a:cs typeface="Inter" pitchFamily="34" charset="-120"/>
+                        <a:rPr lang="ru-RU" sz="1050" dirty="0">
+                          <a:latin typeface="Inter" charset="0"/>
+                          <a:ea typeface="Inter" charset="0"/>
+                          <a:cs typeface="Inter" charset="0"/>
                         </a:rPr>
-                        <a:t>[ПРОПУСК]</a:t>
+                        <a:t>Админ</a:t>
                       </a:r>
                       <a:endParaRPr lang="en-US" sz="1050" dirty="0">
                         <a:latin typeface="Inter" charset="0"/>
@@ -3083,17 +3066,6 @@
                       <a:pPr marL="0" indent="0" algn="l">
                         <a:buNone/>
                       </a:pPr>
-                      <a:r>
-                        <a:rPr lang="en-US" sz="1050" kern="0" spc="-21" dirty="0">
-                          <a:solidFill>
-                            <a:srgbClr val="272525"/>
-                          </a:solidFill>
-                          <a:latin typeface="Inter" pitchFamily="34" charset="0"/>
-                          <a:ea typeface="Inter" pitchFamily="34" charset="-122"/>
-                          <a:cs typeface="Inter" pitchFamily="34" charset="-120"/>
-                        </a:rPr>
-                        <a:t>[ПРОПУСК]</a:t>
-                      </a:r>
                       <a:endParaRPr lang="en-US" sz="1050" dirty="0">
                         <a:latin typeface="Inter" charset="0"/>
                         <a:ea typeface="Inter" charset="0"/>
@@ -3148,17 +3120,6 @@
                       <a:pPr marL="0" indent="0" algn="l">
                         <a:buNone/>
                       </a:pPr>
-                      <a:r>
-                        <a:rPr lang="en-US" sz="1050" kern="0" spc="-21" dirty="0">
-                          <a:solidFill>
-                            <a:srgbClr val="272525"/>
-                          </a:solidFill>
-                          <a:latin typeface="Inter" pitchFamily="34" charset="0"/>
-                          <a:ea typeface="Inter" pitchFamily="34" charset="-122"/>
-                          <a:cs typeface="Inter" pitchFamily="34" charset="-120"/>
-                        </a:rPr>
-                        <a:t>[ПРОПУСК]</a:t>
-                      </a:r>
                       <a:endParaRPr lang="en-US" sz="1050" dirty="0">
                         <a:latin typeface="Inter" charset="0"/>
                         <a:ea typeface="Inter" charset="0"/>

--- a/Защита.pptx
+++ b/Защита.pptx
@@ -5,7 +5,7 @@
     <p:sldMasterId id="2147483648" r:id="rId1"/>
   </p:sldMasterIdLst>
   <p:notesMasterIdLst>
-    <p:notesMasterId r:id="rId16"/>
+    <p:notesMasterId r:id="rId17"/>
   </p:notesMasterIdLst>
   <p:sldIdLst>
     <p:sldId id="256" r:id="rId2"/>
@@ -15,31 +15,32 @@
     <p:sldId id="260" r:id="rId6"/>
     <p:sldId id="261" r:id="rId7"/>
     <p:sldId id="262" r:id="rId8"/>
-    <p:sldId id="263" r:id="rId9"/>
-    <p:sldId id="264" r:id="rId10"/>
-    <p:sldId id="265" r:id="rId11"/>
-    <p:sldId id="266" r:id="rId12"/>
-    <p:sldId id="267" r:id="rId13"/>
-    <p:sldId id="268" r:id="rId14"/>
-    <p:sldId id="269" r:id="rId15"/>
+    <p:sldId id="270" r:id="rId9"/>
+    <p:sldId id="263" r:id="rId10"/>
+    <p:sldId id="264" r:id="rId11"/>
+    <p:sldId id="265" r:id="rId12"/>
+    <p:sldId id="266" r:id="rId13"/>
+    <p:sldId id="267" r:id="rId14"/>
+    <p:sldId id="268" r:id="rId15"/>
+    <p:sldId id="269" r:id="rId16"/>
   </p:sldIdLst>
   <p:sldSz cx="12192000" cy="6858000"/>
   <p:notesSz cx="6858000" cy="12192000"/>
   <p:embeddedFontLst>
     <p:embeddedFont>
       <p:font typeface="Calibri" panose="020F0502020204030204" pitchFamily="34" charset="0"/>
-      <p:regular r:id="rId17"/>
-      <p:bold r:id="rId18"/>
-      <p:italic r:id="rId19"/>
-      <p:boldItalic r:id="rId20"/>
+      <p:regular r:id="rId18"/>
+      <p:bold r:id="rId19"/>
+      <p:italic r:id="rId20"/>
+      <p:boldItalic r:id="rId21"/>
     </p:embeddedFont>
     <p:embeddedFont>
       <p:font typeface="Inter" panose="020B0604020202020204" charset="0"/>
-      <p:regular r:id="rId21"/>
+      <p:regular r:id="rId22"/>
     </p:embeddedFont>
     <p:embeddedFont>
       <p:font typeface="Inter Bold" panose="020B0604020202020204" charset="0"/>
-      <p:regular r:id="rId22"/>
+      <p:regular r:id="rId23"/>
     </p:embeddedFont>
   </p:embeddedFontLst>
   <p:defaultTextStyle>
@@ -771,6 +772,90 @@
 </p:notes>
 </file>
 
+<file path=ppt/notesSlides/notesSlide15.xml><?xml version="1.0" encoding="utf-8"?>
+<p:notes xmlns:a="http://schemas.openxmlformats.org/drawingml/2006/main" xmlns:r="http://schemas.openxmlformats.org/officeDocument/2006/relationships" xmlns:p="http://schemas.openxmlformats.org/presentationml/2006/main">
+  <p:cSld>
+    <p:spTree>
+      <p:nvGrpSpPr>
+        <p:cNvPr id="1" name=""/>
+        <p:cNvGrpSpPr/>
+        <p:nvPr/>
+      </p:nvGrpSpPr>
+      <p:grpSpPr>
+        <a:xfrm>
+          <a:off x="0" y="0"/>
+          <a:ext cx="0" cy="0"/>
+          <a:chOff x="0" y="0"/>
+          <a:chExt cx="0" cy="0"/>
+        </a:xfrm>
+      </p:grpSpPr>
+      <p:sp>
+        <p:nvSpPr>
+          <p:cNvPr id="2" name="Slide Image Placeholder 1"/>
+          <p:cNvSpPr>
+            <a:spLocks noGrp="1" noRot="1" noChangeAspect="1"/>
+          </p:cNvSpPr>
+          <p:nvPr>
+            <p:ph type="sldImg"/>
+          </p:nvPr>
+        </p:nvSpPr>
+        <p:spPr/>
+      </p:sp>
+      <p:sp>
+        <p:nvSpPr>
+          <p:cNvPr id="3" name="Notes Placeholder 2"/>
+          <p:cNvSpPr>
+            <a:spLocks noGrp="1"/>
+          </p:cNvSpPr>
+          <p:nvPr>
+            <p:ph type="body" idx="1"/>
+          </p:nvPr>
+        </p:nvSpPr>
+        <p:spPr/>
+        <p:txBody>
+          <a:bodyPr/>
+          <a:lstStyle/>
+          <a:p>
+            <a:endParaRPr lang="en-US" dirty="0"/>
+          </a:p>
+        </p:txBody>
+      </p:sp>
+      <p:sp>
+        <p:nvSpPr>
+          <p:cNvPr id="4" name="Slide Number Placeholder 3"/>
+          <p:cNvSpPr>
+            <a:spLocks noGrp="1"/>
+          </p:cNvSpPr>
+          <p:nvPr>
+            <p:ph type="sldNum" sz="quarter" idx="10"/>
+          </p:nvPr>
+        </p:nvSpPr>
+        <p:spPr/>
+        <p:txBody>
+          <a:bodyPr/>
+          <a:lstStyle/>
+          <a:p>
+            <a:fld id="{F7021451-1387-4CA6-816F-3879F97B5CBC}" type="slidenum">
+              <a:rPr lang="en-US"/>
+              <a:t>15</a:t>
+            </a:fld>
+            <a:endParaRPr lang="en-US"/>
+          </a:p>
+        </p:txBody>
+      </p:sp>
+    </p:spTree>
+    <p:extLst>
+      <p:ext uri="{BB962C8B-B14F-4D97-AF65-F5344CB8AC3E}">
+        <p14:creationId xmlns:p14="http://schemas.microsoft.com/office/powerpoint/2010/main" val="1024086991"/>
+      </p:ext>
+    </p:extLst>
+  </p:cSld>
+  <p:clrMapOvr>
+    <a:masterClrMapping/>
+  </p:clrMapOvr>
+</p:notes>
+</file>
+
 <file path=ppt/notesSlides/notesSlide2.xml><?xml version="1.0" encoding="utf-8"?>
 <p:notes xmlns:a="http://schemas.openxmlformats.org/drawingml/2006/main" xmlns:r="http://schemas.openxmlformats.org/officeDocument/2006/relationships" xmlns:p="http://schemas.openxmlformats.org/presentationml/2006/main">
   <p:cSld>
@@ -1349,7 +1434,7 @@
     </p:spTree>
     <p:extLst>
       <p:ext uri="{BB962C8B-B14F-4D97-AF65-F5344CB8AC3E}">
-        <p14:creationId xmlns:p14="http://schemas.microsoft.com/office/powerpoint/2010/main" val="1024086991"/>
+        <p14:creationId xmlns:p14="http://schemas.microsoft.com/office/powerpoint/2010/main" val="1759816521"/>
       </p:ext>
     </p:extLst>
   </p:cSld>
@@ -3250,17 +3335,10 @@
               <a:buAutoNum type="arabicPeriod"/>
             </a:pPr>
             <a:r>
-              <a:rPr lang="en-US" sz="1050" kern="0" spc="-21" dirty="0">
-                <a:solidFill>
-                  <a:srgbClr val="272525"/>
-                </a:solidFill>
-                <a:latin typeface="Inter" pitchFamily="34" charset="0"/>
-                <a:ea typeface="Inter" pitchFamily="34" charset="-122"/>
-                <a:cs typeface="Inter" pitchFamily="34" charset="-120"/>
-              </a:rPr>
-              <a:t>[ПРОПУСК: шаг]</a:t>
+              <a:rPr lang="ru-RU" sz="1200" dirty="0"/>
+              <a:t>Создание заявки жителем</a:t>
             </a:r>
-            <a:endParaRPr lang="en-US" sz="1050" dirty="0"/>
+            <a:endParaRPr lang="en-US" sz="1200" dirty="0"/>
           </a:p>
           <a:p>
             <a:pPr marL="213360" indent="-213360" algn="l">
@@ -3272,17 +3350,10 @@
               <a:buAutoNum type="arabicPeriod" startAt="2"/>
             </a:pPr>
             <a:r>
-              <a:rPr lang="en-US" sz="1050" kern="0" spc="-21" dirty="0">
-                <a:solidFill>
-                  <a:srgbClr val="272525"/>
-                </a:solidFill>
-                <a:latin typeface="Inter" pitchFamily="34" charset="0"/>
-                <a:ea typeface="Inter" pitchFamily="34" charset="-122"/>
-                <a:cs typeface="Inter" pitchFamily="34" charset="-120"/>
-              </a:rPr>
-              <a:t>[ПРОПУСК: шаг]</a:t>
+              <a:rPr lang="ru-RU" sz="1200" dirty="0"/>
+              <a:t>Просмотр заявки УК</a:t>
             </a:r>
-            <a:endParaRPr lang="en-US" sz="1050" dirty="0"/>
+            <a:endParaRPr lang="en-US" sz="1200" dirty="0"/>
           </a:p>
           <a:p>
             <a:pPr marL="213360" indent="-213360" algn="l">
@@ -3294,17 +3365,10 @@
               <a:buAutoNum type="arabicPeriod" startAt="3"/>
             </a:pPr>
             <a:r>
-              <a:rPr lang="en-US" sz="1050" kern="0" spc="-21" dirty="0">
-                <a:solidFill>
-                  <a:srgbClr val="272525"/>
-                </a:solidFill>
-                <a:latin typeface="Inter" pitchFamily="34" charset="0"/>
-                <a:ea typeface="Inter" pitchFamily="34" charset="-122"/>
-                <a:cs typeface="Inter" pitchFamily="34" charset="-120"/>
-              </a:rPr>
-              <a:t>[ПРОПУСК: шаг]</a:t>
+              <a:rPr lang="ru-RU" sz="1200" dirty="0"/>
+              <a:t>Смена статуса и назначение</a:t>
             </a:r>
-            <a:endParaRPr lang="en-US" sz="1050" dirty="0"/>
+            <a:endParaRPr lang="en-US" sz="1200" dirty="0"/>
           </a:p>
           <a:p>
             <a:pPr marL="213360" indent="-213360" algn="l">
@@ -3316,17 +3380,10 @@
               <a:buAutoNum type="arabicPeriod" startAt="4"/>
             </a:pPr>
             <a:r>
-              <a:rPr lang="en-US" sz="1050" kern="0" spc="-21" dirty="0">
-                <a:solidFill>
-                  <a:srgbClr val="272525"/>
-                </a:solidFill>
-                <a:latin typeface="Inter" pitchFamily="34" charset="0"/>
-                <a:ea typeface="Inter" pitchFamily="34" charset="-122"/>
-                <a:cs typeface="Inter" pitchFamily="34" charset="-120"/>
-              </a:rPr>
-              <a:t>[ПРОПУСК: шаг]</a:t>
+              <a:rPr lang="ru-RU" sz="1200" dirty="0"/>
+              <a:t>Обратная связь жителя</a:t>
             </a:r>
-            <a:endParaRPr lang="en-US" sz="1050" dirty="0"/>
+            <a:endParaRPr lang="en-US" sz="1200" dirty="0"/>
           </a:p>
         </p:txBody>
       </p:sp>
@@ -3366,7 +3423,51 @@
                 <a:ea typeface="Inter" pitchFamily="34" charset="-122"/>
                 <a:cs typeface="Inter" pitchFamily="34" charset="-120"/>
               </a:rPr>
-              <a:t>Тестовые данные используются там, где указано [модель].</a:t>
+              <a:t>Тестовые данные </a:t>
+            </a:r>
+            <a:r>
+              <a:rPr lang="en-US" sz="1050" kern="0" spc="-21" dirty="0" err="1">
+                <a:solidFill>
+                  <a:srgbClr val="272525"/>
+                </a:solidFill>
+                <a:latin typeface="Inter" pitchFamily="34" charset="0"/>
+                <a:ea typeface="Inter" pitchFamily="34" charset="-122"/>
+                <a:cs typeface="Inter" pitchFamily="34" charset="-120"/>
+              </a:rPr>
+              <a:t>используются</a:t>
+            </a:r>
+            <a:r>
+              <a:rPr lang="en-US" sz="1050" kern="0" spc="-21" dirty="0">
+                <a:solidFill>
+                  <a:srgbClr val="272525"/>
+                </a:solidFill>
+                <a:latin typeface="Inter" pitchFamily="34" charset="0"/>
+                <a:ea typeface="Inter" pitchFamily="34" charset="-122"/>
+                <a:cs typeface="Inter" pitchFamily="34" charset="-120"/>
+              </a:rPr>
+              <a:t> </a:t>
+            </a:r>
+            <a:r>
+              <a:rPr lang="ru-RU" sz="1050" kern="0" spc="-21" dirty="0">
+                <a:solidFill>
+                  <a:srgbClr val="272525"/>
+                </a:solidFill>
+                <a:latin typeface="Inter" pitchFamily="34" charset="0"/>
+                <a:ea typeface="Inter" pitchFamily="34" charset="-122"/>
+                <a:cs typeface="Inter" pitchFamily="34" charset="-120"/>
+              </a:rPr>
+              <a:t>в системе</a:t>
+            </a:r>
+            <a:r>
+              <a:rPr lang="en-US" sz="1050" kern="0" spc="-21" dirty="0">
+                <a:solidFill>
+                  <a:srgbClr val="272525"/>
+                </a:solidFill>
+                <a:latin typeface="Inter" pitchFamily="34" charset="0"/>
+                <a:ea typeface="Inter" pitchFamily="34" charset="-122"/>
+                <a:cs typeface="Inter" pitchFamily="34" charset="-120"/>
+              </a:rPr>
+              <a:t>.</a:t>
             </a:r>
             <a:endParaRPr lang="en-US" sz="1050" dirty="0"/>
           </a:p>
@@ -3381,6 +3482,529 @@
 </file>
 
 <file path=ppt/slides/slide10.xml><?xml version="1.0" encoding="utf-8"?>
+<p:sld xmlns:a="http://schemas.openxmlformats.org/drawingml/2006/main" xmlns:r="http://schemas.openxmlformats.org/officeDocument/2006/relationships" xmlns:p="http://schemas.openxmlformats.org/presentationml/2006/main">
+  <p:cSld name="Slide 9">
+    <p:spTree>
+      <p:nvGrpSpPr>
+        <p:cNvPr id="1" name=""/>
+        <p:cNvGrpSpPr/>
+        <p:nvPr/>
+      </p:nvGrpSpPr>
+      <p:grpSpPr>
+        <a:xfrm>
+          <a:off x="0" y="0"/>
+          <a:ext cx="0" cy="0"/>
+          <a:chOff x="0" y="0"/>
+          <a:chExt cx="0" cy="0"/>
+        </a:xfrm>
+      </p:grpSpPr>
+      <p:sp>
+        <p:nvSpPr>
+          <p:cNvPr id="2" name="Text 0"/>
+          <p:cNvSpPr/>
+          <p:nvPr/>
+        </p:nvSpPr>
+        <p:spPr>
+          <a:xfrm>
+            <a:off x="661475" y="528836"/>
+            <a:ext cx="10868745" cy="396875"/>
+          </a:xfrm>
+          <a:prstGeom prst="rect">
+            <a:avLst/>
+          </a:prstGeom>
+          <a:noFill/>
+          <a:ln/>
+        </p:spPr>
+        <p:txBody>
+          <a:bodyPr wrap="none" lIns="0" tIns="0" rIns="0" bIns="0" rtlCol="0" anchor="t"/>
+          <a:lstStyle/>
+          <a:p>
+            <a:pPr marL="0" indent="0" algn="l">
+              <a:lnSpc>
+                <a:spcPct val="104000"/>
+              </a:lnSpc>
+              <a:buNone/>
+            </a:pPr>
+            <a:r>
+              <a:rPr lang="en-US" sz="2450" b="1" kern="0" spc="-75" dirty="0">
+                <a:solidFill>
+                  <a:srgbClr val="000000"/>
+                </a:solidFill>
+                <a:latin typeface="Inter Bold" pitchFamily="34" charset="0"/>
+                <a:ea typeface="Inter Bold" pitchFamily="34" charset="-122"/>
+                <a:cs typeface="Inter Bold" pitchFamily="34" charset="-120"/>
+              </a:rPr>
+              <a:t>Архитектура решения</a:t>
+            </a:r>
+            <a:endParaRPr lang="en-US" sz="2450" dirty="0"/>
+          </a:p>
+        </p:txBody>
+      </p:sp>
+      <p:sp>
+        <p:nvSpPr>
+          <p:cNvPr id="3" name="Text 1"/>
+          <p:cNvSpPr/>
+          <p:nvPr/>
+        </p:nvSpPr>
+        <p:spPr>
+          <a:xfrm>
+            <a:off x="661475" y="1096367"/>
+            <a:ext cx="11478330" cy="169862"/>
+          </a:xfrm>
+          <a:prstGeom prst="rect">
+            <a:avLst/>
+          </a:prstGeom>
+          <a:noFill/>
+          <a:ln/>
+        </p:spPr>
+        <p:txBody>
+          <a:bodyPr wrap="none" lIns="0" tIns="0" rIns="0" bIns="0" rtlCol="0" anchor="t"/>
+          <a:lstStyle/>
+          <a:p>
+            <a:pPr marL="0" indent="0" algn="l">
+              <a:lnSpc>
+                <a:spcPct val="111000"/>
+              </a:lnSpc>
+              <a:buNone/>
+            </a:pPr>
+            <a:r>
+              <a:rPr lang="en-US" sz="950" kern="0" spc="-20" dirty="0">
+                <a:solidFill>
+                  <a:srgbClr val="272525"/>
+                </a:solidFill>
+                <a:latin typeface="Inter" pitchFamily="34" charset="0"/>
+                <a:ea typeface="Inter" pitchFamily="34" charset="-122"/>
+                <a:cs typeface="Inter" pitchFamily="34" charset="-120"/>
+              </a:rPr>
+              <a:t>Схема взаимодействия основных компонентов системы:</a:t>
+            </a:r>
+            <a:endParaRPr lang="en-US" sz="950" dirty="0"/>
+          </a:p>
+        </p:txBody>
+      </p:sp>
+      <p:pic>
+        <p:nvPicPr>
+          <p:cNvPr id="4" name="Image 0" descr="preencoded.png"/>
+          <p:cNvPicPr>
+            <a:picLocks noChangeAspect="1"/>
+          </p:cNvPicPr>
+          <p:nvPr/>
+        </p:nvPicPr>
+        <p:blipFill>
+          <a:blip r:embed="rId3"/>
+          <a:stretch>
+            <a:fillRect/>
+          </a:stretch>
+        </p:blipFill>
+        <p:spPr>
+          <a:xfrm>
+            <a:off x="2425044" y="1362174"/>
+            <a:ext cx="7341607" cy="4966891"/>
+          </a:xfrm>
+          <a:prstGeom prst="rect">
+            <a:avLst/>
+          </a:prstGeom>
+        </p:spPr>
+      </p:pic>
+      <p:sp>
+        <p:nvSpPr>
+          <p:cNvPr id="5" name="Text 2"/>
+          <p:cNvSpPr/>
+          <p:nvPr/>
+        </p:nvSpPr>
+        <p:spPr>
+          <a:xfrm>
+            <a:off x="5410015" y="3306248"/>
+            <a:ext cx="1336847" cy="917067"/>
+          </a:xfrm>
+          <a:prstGeom prst="rect">
+            <a:avLst/>
+          </a:prstGeom>
+          <a:noFill/>
+          <a:ln/>
+        </p:spPr>
+        <p:txBody>
+          <a:bodyPr wrap="square" lIns="0" tIns="0" rIns="0" bIns="0" rtlCol="0" anchor="t">
+            <a:normAutofit/>
+          </a:bodyPr>
+          <a:lstStyle/>
+          <a:p>
+            <a:pPr marL="0" indent="0" algn="ctr">
+              <a:lnSpc>
+                <a:spcPct val="104000"/>
+              </a:lnSpc>
+              <a:buNone/>
+            </a:pPr>
+            <a:r>
+              <a:rPr lang="en-US" sz="1900" b="1" kern="0" spc="-58" dirty="0">
+                <a:solidFill>
+                  <a:srgbClr val="FFFFFF"/>
+                </a:solidFill>
+                <a:latin typeface="Inter Bold" pitchFamily="34" charset="0"/>
+                <a:ea typeface="Inter Bold" pitchFamily="34" charset="-122"/>
+                <a:cs typeface="Inter Bold" pitchFamily="34" charset="-120"/>
+              </a:rPr>
+              <a:t>Поток обработки заявки</a:t>
+            </a:r>
+            <a:endParaRPr lang="en-US" sz="1900" dirty="0"/>
+          </a:p>
+        </p:txBody>
+      </p:sp>
+      <p:sp>
+        <p:nvSpPr>
+          <p:cNvPr id="6" name="Text 3"/>
+          <p:cNvSpPr/>
+          <p:nvPr/>
+        </p:nvSpPr>
+        <p:spPr>
+          <a:xfrm>
+            <a:off x="7407983" y="4912814"/>
+            <a:ext cx="1988798" cy="305689"/>
+          </a:xfrm>
+          <a:prstGeom prst="rect">
+            <a:avLst/>
+          </a:prstGeom>
+          <a:noFill/>
+          <a:ln/>
+        </p:spPr>
+        <p:txBody>
+          <a:bodyPr wrap="none" lIns="0" tIns="0" rIns="0" bIns="0" rtlCol="0" anchor="t"/>
+          <a:lstStyle/>
+          <a:p>
+            <a:pPr marL="0" indent="0" algn="ctr">
+              <a:lnSpc>
+                <a:spcPct val="104000"/>
+              </a:lnSpc>
+              <a:buNone/>
+            </a:pPr>
+            <a:r>
+              <a:rPr lang="en-US" sz="1900" b="1" kern="0" spc="-58" dirty="0">
+                <a:solidFill>
+                  <a:srgbClr val="272525"/>
+                </a:solidFill>
+                <a:latin typeface="Inter Bold" pitchFamily="34" charset="0"/>
+                <a:ea typeface="Inter Bold" pitchFamily="34" charset="-122"/>
+                <a:cs typeface="Inter Bold" pitchFamily="34" charset="-120"/>
+              </a:rPr>
+              <a:t>Чат‑бот</a:t>
+            </a:r>
+            <a:endParaRPr lang="en-US" sz="1900" dirty="0"/>
+          </a:p>
+        </p:txBody>
+      </p:sp>
+      <p:sp>
+        <p:nvSpPr>
+          <p:cNvPr id="7" name="Text 4"/>
+          <p:cNvSpPr/>
+          <p:nvPr/>
+        </p:nvSpPr>
+        <p:spPr>
+          <a:xfrm>
+            <a:off x="7407983" y="5305455"/>
+            <a:ext cx="1988798" cy="408604"/>
+          </a:xfrm>
+          <a:prstGeom prst="rect">
+            <a:avLst/>
+          </a:prstGeom>
+          <a:noFill/>
+          <a:ln/>
+        </p:spPr>
+        <p:txBody>
+          <a:bodyPr wrap="square" lIns="0" tIns="0" rIns="0" bIns="0" rtlCol="0" anchor="t">
+            <a:normAutofit/>
+          </a:bodyPr>
+          <a:lstStyle/>
+          <a:p>
+            <a:pPr marL="0" indent="0" algn="ctr">
+              <a:lnSpc>
+                <a:spcPct val="87000"/>
+              </a:lnSpc>
+              <a:buNone/>
+            </a:pPr>
+            <a:r>
+              <a:rPr lang="en-US" sz="1500" kern="0" spc="-34" dirty="0">
+                <a:solidFill>
+                  <a:srgbClr val="272525"/>
+                </a:solidFill>
+                <a:latin typeface="Inter" pitchFamily="34" charset="0"/>
+                <a:ea typeface="Inter" pitchFamily="34" charset="-122"/>
+                <a:cs typeface="Inter" pitchFamily="34" charset="-120"/>
+              </a:rPr>
+              <a:t>Навигация и уведомления</a:t>
+            </a:r>
+            <a:endParaRPr lang="en-US" sz="1500" dirty="0"/>
+          </a:p>
+        </p:txBody>
+      </p:sp>
+      <p:sp>
+        <p:nvSpPr>
+          <p:cNvPr id="8" name="Text 5"/>
+          <p:cNvSpPr/>
+          <p:nvPr/>
+        </p:nvSpPr>
+        <p:spPr>
+          <a:xfrm>
+            <a:off x="2747190" y="4912814"/>
+            <a:ext cx="1988797" cy="305689"/>
+          </a:xfrm>
+          <a:prstGeom prst="rect">
+            <a:avLst/>
+          </a:prstGeom>
+          <a:noFill/>
+          <a:ln/>
+        </p:spPr>
+        <p:txBody>
+          <a:bodyPr wrap="none" lIns="0" tIns="0" rIns="0" bIns="0" rtlCol="0" anchor="t"/>
+          <a:lstStyle/>
+          <a:p>
+            <a:pPr marL="0" indent="0" algn="ctr">
+              <a:lnSpc>
+                <a:spcPct val="104000"/>
+              </a:lnSpc>
+              <a:buNone/>
+            </a:pPr>
+            <a:r>
+              <a:rPr lang="en-US" sz="1900" b="1" kern="0" spc="-58" dirty="0">
+                <a:solidFill>
+                  <a:srgbClr val="272525"/>
+                </a:solidFill>
+                <a:latin typeface="Inter Bold" pitchFamily="34" charset="0"/>
+                <a:ea typeface="Inter Bold" pitchFamily="34" charset="-122"/>
+                <a:cs typeface="Inter Bold" pitchFamily="34" charset="-120"/>
+              </a:rPr>
+              <a:t>API обработки</a:t>
+            </a:r>
+            <a:endParaRPr lang="en-US" sz="1900" dirty="0"/>
+          </a:p>
+        </p:txBody>
+      </p:sp>
+      <p:sp>
+        <p:nvSpPr>
+          <p:cNvPr id="9" name="Text 6"/>
+          <p:cNvSpPr/>
+          <p:nvPr/>
+        </p:nvSpPr>
+        <p:spPr>
+          <a:xfrm>
+            <a:off x="2747190" y="5305455"/>
+            <a:ext cx="1988797" cy="408604"/>
+          </a:xfrm>
+          <a:prstGeom prst="rect">
+            <a:avLst/>
+          </a:prstGeom>
+          <a:noFill/>
+          <a:ln/>
+        </p:spPr>
+        <p:txBody>
+          <a:bodyPr wrap="square" lIns="0" tIns="0" rIns="0" bIns="0" rtlCol="0" anchor="t">
+            <a:normAutofit/>
+          </a:bodyPr>
+          <a:lstStyle/>
+          <a:p>
+            <a:pPr marL="0" indent="0" algn="ctr">
+              <a:lnSpc>
+                <a:spcPct val="87000"/>
+              </a:lnSpc>
+              <a:buNone/>
+            </a:pPr>
+            <a:r>
+              <a:rPr lang="en-US" sz="1500" kern="0" spc="-34" dirty="0">
+                <a:solidFill>
+                  <a:srgbClr val="272525"/>
+                </a:solidFill>
+                <a:latin typeface="Inter" pitchFamily="34" charset="0"/>
+                <a:ea typeface="Inter" pitchFamily="34" charset="-122"/>
+                <a:cs typeface="Inter" pitchFamily="34" charset="-120"/>
+              </a:rPr>
+              <a:t>Проверки и логика запросов</a:t>
+            </a:r>
+            <a:endParaRPr lang="en-US" sz="1500" dirty="0"/>
+          </a:p>
+        </p:txBody>
+      </p:sp>
+      <p:sp>
+        <p:nvSpPr>
+          <p:cNvPr id="10" name="Text 7"/>
+          <p:cNvSpPr/>
+          <p:nvPr/>
+        </p:nvSpPr>
+        <p:spPr>
+          <a:xfrm>
+            <a:off x="2747190" y="1865264"/>
+            <a:ext cx="1988797" cy="305689"/>
+          </a:xfrm>
+          <a:prstGeom prst="rect">
+            <a:avLst/>
+          </a:prstGeom>
+          <a:noFill/>
+          <a:ln/>
+        </p:spPr>
+        <p:txBody>
+          <a:bodyPr wrap="none" lIns="0" tIns="0" rIns="0" bIns="0" rtlCol="0" anchor="t"/>
+          <a:lstStyle/>
+          <a:p>
+            <a:pPr marL="0" indent="0" algn="ctr">
+              <a:lnSpc>
+                <a:spcPct val="104000"/>
+              </a:lnSpc>
+              <a:buNone/>
+            </a:pPr>
+            <a:r>
+              <a:rPr lang="en-US" sz="1900" b="1" kern="0" spc="-58" dirty="0">
+                <a:solidFill>
+                  <a:srgbClr val="272525"/>
+                </a:solidFill>
+                <a:latin typeface="Inter Bold" pitchFamily="34" charset="0"/>
+                <a:ea typeface="Inter Bold" pitchFamily="34" charset="-122"/>
+                <a:cs typeface="Inter Bold" pitchFamily="34" charset="-120"/>
+              </a:rPr>
+              <a:t>База данных</a:t>
+            </a:r>
+            <a:endParaRPr lang="en-US" sz="1900" dirty="0"/>
+          </a:p>
+        </p:txBody>
+      </p:sp>
+      <p:sp>
+        <p:nvSpPr>
+          <p:cNvPr id="11" name="Text 8"/>
+          <p:cNvSpPr/>
+          <p:nvPr/>
+        </p:nvSpPr>
+        <p:spPr>
+          <a:xfrm>
+            <a:off x="2747190" y="2257904"/>
+            <a:ext cx="1988797" cy="612907"/>
+          </a:xfrm>
+          <a:prstGeom prst="rect">
+            <a:avLst/>
+          </a:prstGeom>
+          <a:noFill/>
+          <a:ln/>
+        </p:spPr>
+        <p:txBody>
+          <a:bodyPr wrap="square" lIns="0" tIns="0" rIns="0" bIns="0" rtlCol="0" anchor="t">
+            <a:normAutofit/>
+          </a:bodyPr>
+          <a:lstStyle/>
+          <a:p>
+            <a:pPr marL="0" indent="0" algn="ctr">
+              <a:lnSpc>
+                <a:spcPct val="87000"/>
+              </a:lnSpc>
+              <a:buNone/>
+            </a:pPr>
+            <a:r>
+              <a:rPr lang="en-US" sz="1500" kern="0" spc="-34" dirty="0">
+                <a:solidFill>
+                  <a:srgbClr val="272525"/>
+                </a:solidFill>
+                <a:latin typeface="Inter" pitchFamily="34" charset="0"/>
+                <a:ea typeface="Inter" pitchFamily="34" charset="-122"/>
+                <a:cs typeface="Inter" pitchFamily="34" charset="-120"/>
+              </a:rPr>
+              <a:t>Хранение заявок, пользователей, категорий</a:t>
+            </a:r>
+            <a:endParaRPr lang="en-US" sz="1500" dirty="0"/>
+          </a:p>
+        </p:txBody>
+      </p:sp>
+      <p:sp>
+        <p:nvSpPr>
+          <p:cNvPr id="12" name="Text 9"/>
+          <p:cNvSpPr/>
+          <p:nvPr/>
+        </p:nvSpPr>
+        <p:spPr>
+          <a:xfrm>
+            <a:off x="7420720" y="1814485"/>
+            <a:ext cx="1988798" cy="611378"/>
+          </a:xfrm>
+          <a:prstGeom prst="rect">
+            <a:avLst/>
+          </a:prstGeom>
+          <a:noFill/>
+          <a:ln/>
+        </p:spPr>
+        <p:txBody>
+          <a:bodyPr wrap="square" lIns="0" tIns="0" rIns="0" bIns="0" rtlCol="0" anchor="t">
+            <a:normAutofit/>
+          </a:bodyPr>
+          <a:lstStyle/>
+          <a:p>
+            <a:pPr marL="0" indent="0" algn="ctr">
+              <a:lnSpc>
+                <a:spcPct val="104000"/>
+              </a:lnSpc>
+              <a:buNone/>
+            </a:pPr>
+            <a:r>
+              <a:rPr lang="en-US" sz="1900" b="1" kern="0" spc="-58" dirty="0">
+                <a:solidFill>
+                  <a:srgbClr val="272525"/>
+                </a:solidFill>
+                <a:latin typeface="Inter Bold" pitchFamily="34" charset="0"/>
+                <a:ea typeface="Inter Bold" pitchFamily="34" charset="-122"/>
+                <a:cs typeface="Inter Bold" pitchFamily="34" charset="-120"/>
+              </a:rPr>
+              <a:t>Мини‑приложение MAX</a:t>
+            </a:r>
+            <a:endParaRPr lang="en-US" sz="1900" dirty="0"/>
+          </a:p>
+        </p:txBody>
+      </p:sp>
+      <p:sp>
+        <p:nvSpPr>
+          <p:cNvPr id="13" name="Text 10"/>
+          <p:cNvSpPr/>
+          <p:nvPr/>
+        </p:nvSpPr>
+        <p:spPr>
+          <a:xfrm>
+            <a:off x="7420720" y="2512815"/>
+            <a:ext cx="1988798" cy="408604"/>
+          </a:xfrm>
+          <a:prstGeom prst="rect">
+            <a:avLst/>
+          </a:prstGeom>
+          <a:noFill/>
+          <a:ln/>
+        </p:spPr>
+        <p:txBody>
+          <a:bodyPr wrap="square" lIns="0" tIns="0" rIns="0" bIns="0" rtlCol="0" anchor="t">
+            <a:normAutofit/>
+          </a:bodyPr>
+          <a:lstStyle/>
+          <a:p>
+            <a:pPr marL="0" indent="0" algn="ctr">
+              <a:lnSpc>
+                <a:spcPct val="87000"/>
+              </a:lnSpc>
+              <a:buNone/>
+            </a:pPr>
+            <a:r>
+              <a:rPr lang="en-US" sz="1500" kern="0" spc="-34" dirty="0">
+                <a:solidFill>
+                  <a:srgbClr val="272525"/>
+                </a:solidFill>
+                <a:latin typeface="Inter" pitchFamily="34" charset="0"/>
+                <a:ea typeface="Inter" pitchFamily="34" charset="-122"/>
+                <a:cs typeface="Inter" pitchFamily="34" charset="-120"/>
+              </a:rPr>
+              <a:t>Ввод заявки и данных</a:t>
+            </a:r>
+            <a:endParaRPr lang="en-US" sz="1500" dirty="0"/>
+          </a:p>
+        </p:txBody>
+      </p:sp>
+    </p:spTree>
+  </p:cSld>
+  <p:clrMapOvr>
+    <a:masterClrMapping/>
+  </p:clrMapOvr>
+</p:sld>
+</file>
+
+<file path=ppt/slides/slide11.xml><?xml version="1.0" encoding="utf-8"?>
 <p:sld xmlns:a="http://schemas.openxmlformats.org/drawingml/2006/main" xmlns:r="http://schemas.openxmlformats.org/officeDocument/2006/relationships" xmlns:p="http://schemas.openxmlformats.org/presentationml/2006/main">
   <p:cSld name="Slide 10">
     <p:spTree>
@@ -3556,7 +4180,7 @@
           <p:nvPr>
             <p:extLst>
               <p:ext uri="{D42A27DB-BD31-4B8C-83A1-F6EECF244321}">
-                <p14:modId xmlns:p14="http://schemas.microsoft.com/office/powerpoint/2010/main" val="1579011935"/>
+                <p14:modId xmlns:p14="http://schemas.microsoft.com/office/powerpoint/2010/main" val="2665886062"/>
               </p:ext>
             </p:extLst>
           </p:nvPr>
@@ -3967,7 +4591,7 @@
                           <a:ea typeface="Inter" pitchFamily="34" charset="-122"/>
                           <a:cs typeface="Inter" pitchFamily="34" charset="-120"/>
                         </a:rPr>
-                        <a:t>[ПРОПУСК: React / MAX UI]</a:t>
+                        <a:t>Next.js + MAX UI</a:t>
                       </a:r>
                       <a:endParaRPr lang="en-US" sz="1350" dirty="0">
                         <a:latin typeface="Inter" charset="0"/>
@@ -4182,9 +4806,9 @@
                           </a:solidFill>
                           <a:latin typeface="Inter" pitchFamily="34" charset="0"/>
                           <a:ea typeface="Inter" pitchFamily="34" charset="-122"/>
-                          <a:cs typeface="Inter" pitchFamily="34" charset="-120"/>
+                          <a:cs typeface="Inter" charset="0"/>
                         </a:rPr>
-                        <a:t>[ПРОПУСК]</a:t>
+                        <a:t>Next.js</a:t>
                       </a:r>
                       <a:endParaRPr lang="en-US" sz="1350" dirty="0">
                         <a:latin typeface="Inter" charset="0"/>
@@ -4399,9 +5023,9 @@
                           </a:solidFill>
                           <a:latin typeface="Inter" pitchFamily="34" charset="0"/>
                           <a:ea typeface="Inter" pitchFamily="34" charset="-122"/>
-                          <a:cs typeface="Inter" pitchFamily="34" charset="-120"/>
+                          <a:cs typeface="Inter" charset="0"/>
                         </a:rPr>
-                        <a:t>[ПРОПУСК]</a:t>
+                        <a:t>Next.js</a:t>
                       </a:r>
                       <a:endParaRPr lang="en-US" sz="1350" dirty="0">
                         <a:latin typeface="Inter" charset="0"/>
@@ -4616,9 +5240,9 @@
                           </a:solidFill>
                           <a:latin typeface="Inter" pitchFamily="34" charset="0"/>
                           <a:ea typeface="Inter" pitchFamily="34" charset="-122"/>
-                          <a:cs typeface="Inter" pitchFamily="34" charset="-120"/>
+                          <a:cs typeface="Inter" charset="0"/>
                         </a:rPr>
-                        <a:t>[ПРОПУСК]</a:t>
+                        <a:t>PostgreSQL</a:t>
                       </a:r>
                       <a:endParaRPr lang="en-US" sz="1350" dirty="0">
                         <a:latin typeface="Inter" charset="0"/>
@@ -4751,15 +5375,14 @@
               <a:buNone/>
             </a:pPr>
             <a:r>
-              <a:rPr lang="en-US" sz="1350" kern="0" spc="-28" dirty="0">
+              <a:rPr lang="ru-RU" sz="1350" kern="0" spc="-28" dirty="0" err="1">
                 <a:solidFill>
                   <a:srgbClr val="272525"/>
                 </a:solidFill>
                 <a:latin typeface="Inter" pitchFamily="34" charset="0"/>
                 <a:ea typeface="Inter" pitchFamily="34" charset="-122"/>
-                <a:cs typeface="Inter" pitchFamily="34" charset="-120"/>
               </a:rPr>
-              <a:t>[ПРОПУСК: схема архитектуры]</a:t>
+              <a:t>Микросервисная</a:t>
             </a:r>
             <a:endParaRPr lang="en-US" sz="1350" dirty="0"/>
           </a:p>
@@ -4773,7 +5396,7 @@
 </p:sld>
 </file>
 
-<file path=ppt/slides/slide11.xml><?xml version="1.0" encoding="utf-8"?>
+<file path=ppt/slides/slide12.xml><?xml version="1.0" encoding="utf-8"?>
 <p:sld xmlns:a="http://schemas.openxmlformats.org/drawingml/2006/main" xmlns:r="http://schemas.openxmlformats.org/officeDocument/2006/relationships" xmlns:p="http://schemas.openxmlformats.org/presentationml/2006/main">
   <p:cSld name="Slide 11">
     <p:spTree>
@@ -6058,7 +6681,7 @@
 </p:sld>
 </file>
 
-<file path=ppt/slides/slide12.xml><?xml version="1.0" encoding="utf-8"?>
+<file path=ppt/slides/slide13.xml><?xml version="1.0" encoding="utf-8"?>
 <p:sld xmlns:a="http://schemas.openxmlformats.org/drawingml/2006/main" xmlns:r="http://schemas.openxmlformats.org/officeDocument/2006/relationships" xmlns:p="http://schemas.openxmlformats.org/presentationml/2006/main">
   <p:cSld name="Slide 12">
     <p:spTree>
@@ -6512,7 +7135,7 @@
 </p:sld>
 </file>
 
-<file path=ppt/slides/slide13.xml><?xml version="1.0" encoding="utf-8"?>
+<file path=ppt/slides/slide14.xml><?xml version="1.0" encoding="utf-8"?>
 <p:sld xmlns:a="http://schemas.openxmlformats.org/drawingml/2006/main" xmlns:r="http://schemas.openxmlformats.org/officeDocument/2006/relationships" xmlns:p="http://schemas.openxmlformats.org/presentationml/2006/main">
   <p:cSld name="Slide 13">
     <p:spTree>
@@ -7348,7 +7971,7 @@
 </p:sld>
 </file>
 
-<file path=ppt/slides/slide14.xml><?xml version="1.0" encoding="utf-8"?>
+<file path=ppt/slides/slide15.xml><?xml version="1.0" encoding="utf-8"?>
 <p:sld xmlns:a="http://schemas.openxmlformats.org/drawingml/2006/main" xmlns:r="http://schemas.openxmlformats.org/officeDocument/2006/relationships" xmlns:p="http://schemas.openxmlformats.org/presentationml/2006/main">
   <p:cSld name="Slide 14">
     <p:spTree>
@@ -7616,6 +8239,17 @@
               <a:buNone/>
             </a:pPr>
             <a:r>
+              <a:rPr lang="ru-RU" sz="3700" b="1" kern="0" spc="-112" dirty="0">
+                <a:solidFill>
+                  <a:srgbClr val="000000"/>
+                </a:solidFill>
+                <a:latin typeface="Inter Bold" pitchFamily="34" charset="0"/>
+                <a:ea typeface="Inter Bold" pitchFamily="34" charset="-122"/>
+                <a:cs typeface="Inter Bold" pitchFamily="34" charset="-120"/>
+              </a:rPr>
+              <a:t>ЖКХ в </a:t>
+            </a:r>
+            <a:r>
               <a:rPr lang="en-US" sz="3700" b="1" kern="0" spc="-112" dirty="0">
                 <a:solidFill>
                   <a:srgbClr val="000000"/>
@@ -7624,7 +8258,7 @@
                 <a:ea typeface="Inter Bold" pitchFamily="34" charset="-122"/>
                 <a:cs typeface="Inter Bold" pitchFamily="34" charset="-120"/>
               </a:rPr>
-              <a:t>[ПРОПУСК: название решения]</a:t>
+              <a:t>MAX</a:t>
             </a:r>
             <a:endParaRPr lang="en-US" sz="3700" dirty="0"/>
           </a:p>
@@ -7723,7 +8357,7 @@
           <p:nvPr>
             <p:extLst>
               <p:ext uri="{D42A27DB-BD31-4B8C-83A1-F6EECF244321}">
-                <p14:modId xmlns:p14="http://schemas.microsoft.com/office/powerpoint/2010/main" val="1579011935"/>
+                <p14:modId xmlns:p14="http://schemas.microsoft.com/office/powerpoint/2010/main" val="2900834329"/>
               </p:ext>
             </p:extLst>
           </p:nvPr>
@@ -8203,15 +8837,12 @@
                         <a:buNone/>
                       </a:pPr>
                       <a:r>
-                        <a:rPr lang="en-US" sz="1450" kern="0" spc="-30" dirty="0">
-                          <a:solidFill>
-                            <a:srgbClr val="272525"/>
-                          </a:solidFill>
-                          <a:latin typeface="Inter" pitchFamily="34" charset="0"/>
-                          <a:ea typeface="Inter" pitchFamily="34" charset="-122"/>
-                          <a:cs typeface="Inter" pitchFamily="34" charset="-120"/>
+                        <a:rPr lang="en-US" sz="1450" dirty="0" err="1">
+                          <a:latin typeface="Inter" charset="0"/>
+                          <a:ea typeface="Inter" charset="0"/>
+                          <a:cs typeface="Inter" charset="0"/>
                         </a:rPr>
-                        <a:t>Frontend</a:t>
+                        <a:t>FullStack</a:t>
                       </a:r>
                       <a:endParaRPr lang="en-US" sz="1450" dirty="0">
                         <a:latin typeface="Inter" charset="0"/>
@@ -8351,7 +8982,18 @@
                           <a:ea typeface="Inter" pitchFamily="34" charset="-122"/>
                           <a:cs typeface="Inter" pitchFamily="34" charset="-120"/>
                         </a:rPr>
-                        <a:t>Мини-приложение в MAX, UI</a:t>
+                        <a:t>Мини-приложение в MAX, UI, API, CI/CD</a:t>
+                      </a:r>
+                      <a:r>
+                        <a:rPr lang="ru-RU" sz="1450" kern="0" spc="-30" dirty="0">
+                          <a:solidFill>
+                            <a:srgbClr val="272525"/>
+                          </a:solidFill>
+                          <a:latin typeface="Inter" pitchFamily="34" charset="0"/>
+                          <a:ea typeface="Inter" pitchFamily="34" charset="-122"/>
+                          <a:cs typeface="Inter" pitchFamily="34" charset="-120"/>
+                        </a:rPr>
+                        <a:t>, БД</a:t>
                       </a:r>
                       <a:endParaRPr lang="en-US" sz="1450" dirty="0">
                         <a:latin typeface="Inter" charset="0"/>
@@ -11661,7 +12303,7 @@
               <a:buNone/>
             </a:pPr>
             <a:r>
-              <a:rPr lang="en-US" sz="2950" b="1" kern="0" spc="-89" dirty="0">
+              <a:rPr lang="en-US" sz="2950" b="1" kern="0" spc="-89" dirty="0" err="1">
                 <a:solidFill>
                   <a:srgbClr val="000000"/>
                 </a:solidFill>
@@ -11670,6 +12312,17 @@
                 <a:cs typeface="Inter Bold" pitchFamily="34" charset="-120"/>
               </a:rPr>
               <a:t>Скриншоты</a:t>
+            </a:r>
+            <a:r>
+              <a:rPr lang="ru-RU" sz="2950" b="1" kern="0" spc="-89" dirty="0">
+                <a:solidFill>
+                  <a:srgbClr val="000000"/>
+                </a:solidFill>
+                <a:latin typeface="Inter Bold" pitchFamily="34" charset="0"/>
+                <a:ea typeface="Inter Bold" pitchFamily="34" charset="-122"/>
+                <a:cs typeface="Inter Bold" pitchFamily="34" charset="-120"/>
+              </a:rPr>
+              <a:t> Жителя</a:t>
             </a:r>
             <a:endParaRPr lang="en-US" sz="2950" dirty="0"/>
           </a:p>
@@ -11775,6 +12428,190 @@
 
 <file path=ppt/slides/slide8.xml><?xml version="1.0" encoding="utf-8"?>
 <p:sld xmlns:a="http://schemas.openxmlformats.org/drawingml/2006/main" xmlns:r="http://schemas.openxmlformats.org/officeDocument/2006/relationships" xmlns:p="http://schemas.openxmlformats.org/presentationml/2006/main">
+  <p:cSld>
+    <p:spTree>
+      <p:nvGrpSpPr>
+        <p:cNvPr id="1" name=""/>
+        <p:cNvGrpSpPr/>
+        <p:nvPr/>
+      </p:nvGrpSpPr>
+      <p:grpSpPr>
+        <a:xfrm>
+          <a:off x="0" y="0"/>
+          <a:ext cx="0" cy="0"/>
+          <a:chOff x="0" y="0"/>
+          <a:chExt cx="0" cy="0"/>
+        </a:xfrm>
+      </p:grpSpPr>
+      <p:sp>
+        <p:nvSpPr>
+          <p:cNvPr id="2" name="Text 0"/>
+          <p:cNvSpPr/>
+          <p:nvPr/>
+        </p:nvSpPr>
+        <p:spPr>
+          <a:xfrm>
+            <a:off x="661475" y="418398"/>
+            <a:ext cx="10868745" cy="472480"/>
+          </a:xfrm>
+          <a:prstGeom prst="rect">
+            <a:avLst/>
+          </a:prstGeom>
+          <a:noFill/>
+          <a:ln/>
+        </p:spPr>
+        <p:txBody>
+          <a:bodyPr wrap="none" lIns="0" tIns="0" rIns="0" bIns="0" rtlCol="0" anchor="t"/>
+          <a:lstStyle/>
+          <a:p>
+            <a:pPr marL="0" indent="0" algn="l">
+              <a:lnSpc>
+                <a:spcPct val="104000"/>
+              </a:lnSpc>
+              <a:buNone/>
+            </a:pPr>
+            <a:r>
+              <a:rPr lang="en-US" sz="2950" b="1" kern="0" spc="-89" dirty="0" err="1">
+                <a:solidFill>
+                  <a:srgbClr val="000000"/>
+                </a:solidFill>
+                <a:latin typeface="Inter Bold" pitchFamily="34" charset="0"/>
+                <a:ea typeface="Inter Bold" pitchFamily="34" charset="-122"/>
+                <a:cs typeface="Inter Bold" pitchFamily="34" charset="-120"/>
+              </a:rPr>
+              <a:t>Скриншоты</a:t>
+            </a:r>
+            <a:r>
+              <a:rPr lang="en-US" sz="2950" b="1" kern="0" spc="-89" dirty="0">
+                <a:solidFill>
+                  <a:srgbClr val="000000"/>
+                </a:solidFill>
+                <a:latin typeface="Inter Bold" pitchFamily="34" charset="0"/>
+                <a:ea typeface="Inter Bold" pitchFamily="34" charset="-122"/>
+                <a:cs typeface="Inter Bold" pitchFamily="34" charset="-120"/>
+              </a:rPr>
+              <a:t> </a:t>
+            </a:r>
+            <a:r>
+              <a:rPr lang="ru-RU" sz="2950" b="1" kern="0" spc="-89" dirty="0">
+                <a:solidFill>
+                  <a:srgbClr val="000000"/>
+                </a:solidFill>
+                <a:latin typeface="Inter Bold" pitchFamily="34" charset="0"/>
+                <a:ea typeface="Inter Bold" pitchFamily="34" charset="-122"/>
+                <a:cs typeface="Inter Bold" pitchFamily="34" charset="-120"/>
+              </a:rPr>
+              <a:t>Управляющей компании</a:t>
+            </a:r>
+            <a:endParaRPr lang="en-US" sz="2950" dirty="0"/>
+          </a:p>
+        </p:txBody>
+      </p:sp>
+      <p:pic>
+        <p:nvPicPr>
+          <p:cNvPr id="10" name="Рисунок 9">
+            <a:extLst>
+              <a:ext uri="{FF2B5EF4-FFF2-40B4-BE49-F238E27FC236}">
+                <a16:creationId xmlns:a16="http://schemas.microsoft.com/office/drawing/2014/main" id="{D1FACDA7-32A4-4F2C-9932-F958FA0DCCFA}"/>
+              </a:ext>
+            </a:extLst>
+          </p:cNvPr>
+          <p:cNvPicPr>
+            <a:picLocks noChangeAspect="1"/>
+          </p:cNvPicPr>
+          <p:nvPr/>
+        </p:nvPicPr>
+        <p:blipFill>
+          <a:blip r:embed="rId3"/>
+          <a:stretch>
+            <a:fillRect/>
+          </a:stretch>
+        </p:blipFill>
+        <p:spPr>
+          <a:xfrm>
+            <a:off x="1545694" y="979713"/>
+            <a:ext cx="2557054" cy="5682343"/>
+          </a:xfrm>
+          <a:prstGeom prst="rect">
+            <a:avLst/>
+          </a:prstGeom>
+        </p:spPr>
+      </p:pic>
+      <p:pic>
+        <p:nvPicPr>
+          <p:cNvPr id="12" name="Рисунок 11">
+            <a:extLst>
+              <a:ext uri="{FF2B5EF4-FFF2-40B4-BE49-F238E27FC236}">
+                <a16:creationId xmlns:a16="http://schemas.microsoft.com/office/drawing/2014/main" id="{45786DB4-ED12-4F8B-9C34-25F72E9D639E}"/>
+              </a:ext>
+            </a:extLst>
+          </p:cNvPr>
+          <p:cNvPicPr>
+            <a:picLocks noChangeAspect="1"/>
+          </p:cNvPicPr>
+          <p:nvPr/>
+        </p:nvPicPr>
+        <p:blipFill>
+          <a:blip r:embed="rId4"/>
+          <a:stretch>
+            <a:fillRect/>
+          </a:stretch>
+        </p:blipFill>
+        <p:spPr>
+          <a:xfrm>
+            <a:off x="5019870" y="979713"/>
+            <a:ext cx="2523270" cy="5607266"/>
+          </a:xfrm>
+          <a:prstGeom prst="rect">
+            <a:avLst/>
+          </a:prstGeom>
+        </p:spPr>
+      </p:pic>
+      <p:pic>
+        <p:nvPicPr>
+          <p:cNvPr id="14" name="Рисунок 13">
+            <a:extLst>
+              <a:ext uri="{FF2B5EF4-FFF2-40B4-BE49-F238E27FC236}">
+                <a16:creationId xmlns:a16="http://schemas.microsoft.com/office/drawing/2014/main" id="{C1D737B0-D79A-4C50-BEA3-31F13AF4D73B}"/>
+              </a:ext>
+            </a:extLst>
+          </p:cNvPr>
+          <p:cNvPicPr>
+            <a:picLocks noChangeAspect="1"/>
+          </p:cNvPicPr>
+          <p:nvPr/>
+        </p:nvPicPr>
+        <p:blipFill>
+          <a:blip r:embed="rId5"/>
+          <a:stretch>
+            <a:fillRect/>
+          </a:stretch>
+        </p:blipFill>
+        <p:spPr>
+          <a:xfrm>
+            <a:off x="8359517" y="979713"/>
+            <a:ext cx="2523271" cy="5607269"/>
+          </a:xfrm>
+          <a:prstGeom prst="rect">
+            <a:avLst/>
+          </a:prstGeom>
+        </p:spPr>
+      </p:pic>
+    </p:spTree>
+    <p:extLst>
+      <p:ext uri="{BB962C8B-B14F-4D97-AF65-F5344CB8AC3E}">
+        <p14:creationId xmlns:p14="http://schemas.microsoft.com/office/powerpoint/2010/main" val="1863258738"/>
+      </p:ext>
+    </p:extLst>
+  </p:cSld>
+  <p:clrMapOvr>
+    <a:masterClrMapping/>
+  </p:clrMapOvr>
+</p:sld>
+</file>
+
+<file path=ppt/slides/slide9.xml><?xml version="1.0" encoding="utf-8"?>
+<p:sld xmlns:a="http://schemas.openxmlformats.org/drawingml/2006/main" xmlns:r="http://schemas.openxmlformats.org/officeDocument/2006/relationships" xmlns:p="http://schemas.openxmlformats.org/presentationml/2006/main">
   <p:cSld name="Slide 8">
     <p:spTree>
       <p:nvGrpSpPr>
@@ -12962,529 +13799,6 @@
               <a:t>Примечание: метрики — гипотеза. Проверим на пилоте.</a:t>
             </a:r>
             <a:endParaRPr lang="en-US" sz="1300" dirty="0"/>
-          </a:p>
-        </p:txBody>
-      </p:sp>
-    </p:spTree>
-  </p:cSld>
-  <p:clrMapOvr>
-    <a:masterClrMapping/>
-  </p:clrMapOvr>
-</p:sld>
-</file>
-
-<file path=ppt/slides/slide9.xml><?xml version="1.0" encoding="utf-8"?>
-<p:sld xmlns:a="http://schemas.openxmlformats.org/drawingml/2006/main" xmlns:r="http://schemas.openxmlformats.org/officeDocument/2006/relationships" xmlns:p="http://schemas.openxmlformats.org/presentationml/2006/main">
-  <p:cSld name="Slide 9">
-    <p:spTree>
-      <p:nvGrpSpPr>
-        <p:cNvPr id="1" name=""/>
-        <p:cNvGrpSpPr/>
-        <p:nvPr/>
-      </p:nvGrpSpPr>
-      <p:grpSpPr>
-        <a:xfrm>
-          <a:off x="0" y="0"/>
-          <a:ext cx="0" cy="0"/>
-          <a:chOff x="0" y="0"/>
-          <a:chExt cx="0" cy="0"/>
-        </a:xfrm>
-      </p:grpSpPr>
-      <p:sp>
-        <p:nvSpPr>
-          <p:cNvPr id="2" name="Text 0"/>
-          <p:cNvSpPr/>
-          <p:nvPr/>
-        </p:nvSpPr>
-        <p:spPr>
-          <a:xfrm>
-            <a:off x="661475" y="528836"/>
-            <a:ext cx="10868745" cy="396875"/>
-          </a:xfrm>
-          <a:prstGeom prst="rect">
-            <a:avLst/>
-          </a:prstGeom>
-          <a:noFill/>
-          <a:ln/>
-        </p:spPr>
-        <p:txBody>
-          <a:bodyPr wrap="none" lIns="0" tIns="0" rIns="0" bIns="0" rtlCol="0" anchor="t"/>
-          <a:lstStyle/>
-          <a:p>
-            <a:pPr marL="0" indent="0" algn="l">
-              <a:lnSpc>
-                <a:spcPct val="104000"/>
-              </a:lnSpc>
-              <a:buNone/>
-            </a:pPr>
-            <a:r>
-              <a:rPr lang="en-US" sz="2450" b="1" kern="0" spc="-75" dirty="0">
-                <a:solidFill>
-                  <a:srgbClr val="000000"/>
-                </a:solidFill>
-                <a:latin typeface="Inter Bold" pitchFamily="34" charset="0"/>
-                <a:ea typeface="Inter Bold" pitchFamily="34" charset="-122"/>
-                <a:cs typeface="Inter Bold" pitchFamily="34" charset="-120"/>
-              </a:rPr>
-              <a:t>Архитектура решения</a:t>
-            </a:r>
-            <a:endParaRPr lang="en-US" sz="2450" dirty="0"/>
-          </a:p>
-        </p:txBody>
-      </p:sp>
-      <p:sp>
-        <p:nvSpPr>
-          <p:cNvPr id="3" name="Text 1"/>
-          <p:cNvSpPr/>
-          <p:nvPr/>
-        </p:nvSpPr>
-        <p:spPr>
-          <a:xfrm>
-            <a:off x="661475" y="1096367"/>
-            <a:ext cx="11478330" cy="169862"/>
-          </a:xfrm>
-          <a:prstGeom prst="rect">
-            <a:avLst/>
-          </a:prstGeom>
-          <a:noFill/>
-          <a:ln/>
-        </p:spPr>
-        <p:txBody>
-          <a:bodyPr wrap="none" lIns="0" tIns="0" rIns="0" bIns="0" rtlCol="0" anchor="t"/>
-          <a:lstStyle/>
-          <a:p>
-            <a:pPr marL="0" indent="0" algn="l">
-              <a:lnSpc>
-                <a:spcPct val="111000"/>
-              </a:lnSpc>
-              <a:buNone/>
-            </a:pPr>
-            <a:r>
-              <a:rPr lang="en-US" sz="950" kern="0" spc="-20" dirty="0">
-                <a:solidFill>
-                  <a:srgbClr val="272525"/>
-                </a:solidFill>
-                <a:latin typeface="Inter" pitchFamily="34" charset="0"/>
-                <a:ea typeface="Inter" pitchFamily="34" charset="-122"/>
-                <a:cs typeface="Inter" pitchFamily="34" charset="-120"/>
-              </a:rPr>
-              <a:t>Схема взаимодействия основных компонентов системы:</a:t>
-            </a:r>
-            <a:endParaRPr lang="en-US" sz="950" dirty="0"/>
-          </a:p>
-        </p:txBody>
-      </p:sp>
-      <p:pic>
-        <p:nvPicPr>
-          <p:cNvPr id="4" name="Image 0" descr="preencoded.png"/>
-          <p:cNvPicPr>
-            <a:picLocks noChangeAspect="1"/>
-          </p:cNvPicPr>
-          <p:nvPr/>
-        </p:nvPicPr>
-        <p:blipFill>
-          <a:blip r:embed="rId3"/>
-          <a:stretch>
-            <a:fillRect/>
-          </a:stretch>
-        </p:blipFill>
-        <p:spPr>
-          <a:xfrm>
-            <a:off x="2425044" y="1362174"/>
-            <a:ext cx="7341607" cy="4966891"/>
-          </a:xfrm>
-          <a:prstGeom prst="rect">
-            <a:avLst/>
-          </a:prstGeom>
-        </p:spPr>
-      </p:pic>
-      <p:sp>
-        <p:nvSpPr>
-          <p:cNvPr id="5" name="Text 2"/>
-          <p:cNvSpPr/>
-          <p:nvPr/>
-        </p:nvSpPr>
-        <p:spPr>
-          <a:xfrm>
-            <a:off x="5410015" y="3306248"/>
-            <a:ext cx="1336847" cy="917067"/>
-          </a:xfrm>
-          <a:prstGeom prst="rect">
-            <a:avLst/>
-          </a:prstGeom>
-          <a:noFill/>
-          <a:ln/>
-        </p:spPr>
-        <p:txBody>
-          <a:bodyPr wrap="square" lIns="0" tIns="0" rIns="0" bIns="0" rtlCol="0" anchor="t">
-            <a:normAutofit/>
-          </a:bodyPr>
-          <a:lstStyle/>
-          <a:p>
-            <a:pPr marL="0" indent="0" algn="ctr">
-              <a:lnSpc>
-                <a:spcPct val="104000"/>
-              </a:lnSpc>
-              <a:buNone/>
-            </a:pPr>
-            <a:r>
-              <a:rPr lang="en-US" sz="1900" b="1" kern="0" spc="-58" dirty="0">
-                <a:solidFill>
-                  <a:srgbClr val="FFFFFF"/>
-                </a:solidFill>
-                <a:latin typeface="Inter Bold" pitchFamily="34" charset="0"/>
-                <a:ea typeface="Inter Bold" pitchFamily="34" charset="-122"/>
-                <a:cs typeface="Inter Bold" pitchFamily="34" charset="-120"/>
-              </a:rPr>
-              <a:t>Поток обработки заявки</a:t>
-            </a:r>
-            <a:endParaRPr lang="en-US" sz="1900" dirty="0"/>
-          </a:p>
-        </p:txBody>
-      </p:sp>
-      <p:sp>
-        <p:nvSpPr>
-          <p:cNvPr id="6" name="Text 3"/>
-          <p:cNvSpPr/>
-          <p:nvPr/>
-        </p:nvSpPr>
-        <p:spPr>
-          <a:xfrm>
-            <a:off x="7407983" y="4912814"/>
-            <a:ext cx="1988798" cy="305689"/>
-          </a:xfrm>
-          <a:prstGeom prst="rect">
-            <a:avLst/>
-          </a:prstGeom>
-          <a:noFill/>
-          <a:ln/>
-        </p:spPr>
-        <p:txBody>
-          <a:bodyPr wrap="none" lIns="0" tIns="0" rIns="0" bIns="0" rtlCol="0" anchor="t"/>
-          <a:lstStyle/>
-          <a:p>
-            <a:pPr marL="0" indent="0" algn="ctr">
-              <a:lnSpc>
-                <a:spcPct val="104000"/>
-              </a:lnSpc>
-              <a:buNone/>
-            </a:pPr>
-            <a:r>
-              <a:rPr lang="en-US" sz="1900" b="1" kern="0" spc="-58" dirty="0">
-                <a:solidFill>
-                  <a:srgbClr val="272525"/>
-                </a:solidFill>
-                <a:latin typeface="Inter Bold" pitchFamily="34" charset="0"/>
-                <a:ea typeface="Inter Bold" pitchFamily="34" charset="-122"/>
-                <a:cs typeface="Inter Bold" pitchFamily="34" charset="-120"/>
-              </a:rPr>
-              <a:t>Чат‑бот</a:t>
-            </a:r>
-            <a:endParaRPr lang="en-US" sz="1900" dirty="0"/>
-          </a:p>
-        </p:txBody>
-      </p:sp>
-      <p:sp>
-        <p:nvSpPr>
-          <p:cNvPr id="7" name="Text 4"/>
-          <p:cNvSpPr/>
-          <p:nvPr/>
-        </p:nvSpPr>
-        <p:spPr>
-          <a:xfrm>
-            <a:off x="7407983" y="5305455"/>
-            <a:ext cx="1988798" cy="408604"/>
-          </a:xfrm>
-          <a:prstGeom prst="rect">
-            <a:avLst/>
-          </a:prstGeom>
-          <a:noFill/>
-          <a:ln/>
-        </p:spPr>
-        <p:txBody>
-          <a:bodyPr wrap="square" lIns="0" tIns="0" rIns="0" bIns="0" rtlCol="0" anchor="t">
-            <a:normAutofit/>
-          </a:bodyPr>
-          <a:lstStyle/>
-          <a:p>
-            <a:pPr marL="0" indent="0" algn="ctr">
-              <a:lnSpc>
-                <a:spcPct val="87000"/>
-              </a:lnSpc>
-              <a:buNone/>
-            </a:pPr>
-            <a:r>
-              <a:rPr lang="en-US" sz="1500" kern="0" spc="-34" dirty="0">
-                <a:solidFill>
-                  <a:srgbClr val="272525"/>
-                </a:solidFill>
-                <a:latin typeface="Inter" pitchFamily="34" charset="0"/>
-                <a:ea typeface="Inter" pitchFamily="34" charset="-122"/>
-                <a:cs typeface="Inter" pitchFamily="34" charset="-120"/>
-              </a:rPr>
-              <a:t>Навигация и уведомления</a:t>
-            </a:r>
-            <a:endParaRPr lang="en-US" sz="1500" dirty="0"/>
-          </a:p>
-        </p:txBody>
-      </p:sp>
-      <p:sp>
-        <p:nvSpPr>
-          <p:cNvPr id="8" name="Text 5"/>
-          <p:cNvSpPr/>
-          <p:nvPr/>
-        </p:nvSpPr>
-        <p:spPr>
-          <a:xfrm>
-            <a:off x="2747190" y="4912814"/>
-            <a:ext cx="1988797" cy="305689"/>
-          </a:xfrm>
-          <a:prstGeom prst="rect">
-            <a:avLst/>
-          </a:prstGeom>
-          <a:noFill/>
-          <a:ln/>
-        </p:spPr>
-        <p:txBody>
-          <a:bodyPr wrap="none" lIns="0" tIns="0" rIns="0" bIns="0" rtlCol="0" anchor="t"/>
-          <a:lstStyle/>
-          <a:p>
-            <a:pPr marL="0" indent="0" algn="ctr">
-              <a:lnSpc>
-                <a:spcPct val="104000"/>
-              </a:lnSpc>
-              <a:buNone/>
-            </a:pPr>
-            <a:r>
-              <a:rPr lang="en-US" sz="1900" b="1" kern="0" spc="-58" dirty="0">
-                <a:solidFill>
-                  <a:srgbClr val="272525"/>
-                </a:solidFill>
-                <a:latin typeface="Inter Bold" pitchFamily="34" charset="0"/>
-                <a:ea typeface="Inter Bold" pitchFamily="34" charset="-122"/>
-                <a:cs typeface="Inter Bold" pitchFamily="34" charset="-120"/>
-              </a:rPr>
-              <a:t>API обработки</a:t>
-            </a:r>
-            <a:endParaRPr lang="en-US" sz="1900" dirty="0"/>
-          </a:p>
-        </p:txBody>
-      </p:sp>
-      <p:sp>
-        <p:nvSpPr>
-          <p:cNvPr id="9" name="Text 6"/>
-          <p:cNvSpPr/>
-          <p:nvPr/>
-        </p:nvSpPr>
-        <p:spPr>
-          <a:xfrm>
-            <a:off x="2747190" y="5305455"/>
-            <a:ext cx="1988797" cy="408604"/>
-          </a:xfrm>
-          <a:prstGeom prst="rect">
-            <a:avLst/>
-          </a:prstGeom>
-          <a:noFill/>
-          <a:ln/>
-        </p:spPr>
-        <p:txBody>
-          <a:bodyPr wrap="square" lIns="0" tIns="0" rIns="0" bIns="0" rtlCol="0" anchor="t">
-            <a:normAutofit/>
-          </a:bodyPr>
-          <a:lstStyle/>
-          <a:p>
-            <a:pPr marL="0" indent="0" algn="ctr">
-              <a:lnSpc>
-                <a:spcPct val="87000"/>
-              </a:lnSpc>
-              <a:buNone/>
-            </a:pPr>
-            <a:r>
-              <a:rPr lang="en-US" sz="1500" kern="0" spc="-34" dirty="0">
-                <a:solidFill>
-                  <a:srgbClr val="272525"/>
-                </a:solidFill>
-                <a:latin typeface="Inter" pitchFamily="34" charset="0"/>
-                <a:ea typeface="Inter" pitchFamily="34" charset="-122"/>
-                <a:cs typeface="Inter" pitchFamily="34" charset="-120"/>
-              </a:rPr>
-              <a:t>Проверки и логика запросов</a:t>
-            </a:r>
-            <a:endParaRPr lang="en-US" sz="1500" dirty="0"/>
-          </a:p>
-        </p:txBody>
-      </p:sp>
-      <p:sp>
-        <p:nvSpPr>
-          <p:cNvPr id="10" name="Text 7"/>
-          <p:cNvSpPr/>
-          <p:nvPr/>
-        </p:nvSpPr>
-        <p:spPr>
-          <a:xfrm>
-            <a:off x="2747190" y="1865264"/>
-            <a:ext cx="1988797" cy="305689"/>
-          </a:xfrm>
-          <a:prstGeom prst="rect">
-            <a:avLst/>
-          </a:prstGeom>
-          <a:noFill/>
-          <a:ln/>
-        </p:spPr>
-        <p:txBody>
-          <a:bodyPr wrap="none" lIns="0" tIns="0" rIns="0" bIns="0" rtlCol="0" anchor="t"/>
-          <a:lstStyle/>
-          <a:p>
-            <a:pPr marL="0" indent="0" algn="ctr">
-              <a:lnSpc>
-                <a:spcPct val="104000"/>
-              </a:lnSpc>
-              <a:buNone/>
-            </a:pPr>
-            <a:r>
-              <a:rPr lang="en-US" sz="1900" b="1" kern="0" spc="-58" dirty="0">
-                <a:solidFill>
-                  <a:srgbClr val="272525"/>
-                </a:solidFill>
-                <a:latin typeface="Inter Bold" pitchFamily="34" charset="0"/>
-                <a:ea typeface="Inter Bold" pitchFamily="34" charset="-122"/>
-                <a:cs typeface="Inter Bold" pitchFamily="34" charset="-120"/>
-              </a:rPr>
-              <a:t>База данных</a:t>
-            </a:r>
-            <a:endParaRPr lang="en-US" sz="1900" dirty="0"/>
-          </a:p>
-        </p:txBody>
-      </p:sp>
-      <p:sp>
-        <p:nvSpPr>
-          <p:cNvPr id="11" name="Text 8"/>
-          <p:cNvSpPr/>
-          <p:nvPr/>
-        </p:nvSpPr>
-        <p:spPr>
-          <a:xfrm>
-            <a:off x="2747190" y="2257904"/>
-            <a:ext cx="1988797" cy="612907"/>
-          </a:xfrm>
-          <a:prstGeom prst="rect">
-            <a:avLst/>
-          </a:prstGeom>
-          <a:noFill/>
-          <a:ln/>
-        </p:spPr>
-        <p:txBody>
-          <a:bodyPr wrap="square" lIns="0" tIns="0" rIns="0" bIns="0" rtlCol="0" anchor="t">
-            <a:normAutofit/>
-          </a:bodyPr>
-          <a:lstStyle/>
-          <a:p>
-            <a:pPr marL="0" indent="0" algn="ctr">
-              <a:lnSpc>
-                <a:spcPct val="87000"/>
-              </a:lnSpc>
-              <a:buNone/>
-            </a:pPr>
-            <a:r>
-              <a:rPr lang="en-US" sz="1500" kern="0" spc="-34" dirty="0">
-                <a:solidFill>
-                  <a:srgbClr val="272525"/>
-                </a:solidFill>
-                <a:latin typeface="Inter" pitchFamily="34" charset="0"/>
-                <a:ea typeface="Inter" pitchFamily="34" charset="-122"/>
-                <a:cs typeface="Inter" pitchFamily="34" charset="-120"/>
-              </a:rPr>
-              <a:t>Хранение заявок, пользователей, категорий</a:t>
-            </a:r>
-            <a:endParaRPr lang="en-US" sz="1500" dirty="0"/>
-          </a:p>
-        </p:txBody>
-      </p:sp>
-      <p:sp>
-        <p:nvSpPr>
-          <p:cNvPr id="12" name="Text 9"/>
-          <p:cNvSpPr/>
-          <p:nvPr/>
-        </p:nvSpPr>
-        <p:spPr>
-          <a:xfrm>
-            <a:off x="7420720" y="1814485"/>
-            <a:ext cx="1988798" cy="611378"/>
-          </a:xfrm>
-          <a:prstGeom prst="rect">
-            <a:avLst/>
-          </a:prstGeom>
-          <a:noFill/>
-          <a:ln/>
-        </p:spPr>
-        <p:txBody>
-          <a:bodyPr wrap="square" lIns="0" tIns="0" rIns="0" bIns="0" rtlCol="0" anchor="t">
-            <a:normAutofit/>
-          </a:bodyPr>
-          <a:lstStyle/>
-          <a:p>
-            <a:pPr marL="0" indent="0" algn="ctr">
-              <a:lnSpc>
-                <a:spcPct val="104000"/>
-              </a:lnSpc>
-              <a:buNone/>
-            </a:pPr>
-            <a:r>
-              <a:rPr lang="en-US" sz="1900" b="1" kern="0" spc="-58" dirty="0">
-                <a:solidFill>
-                  <a:srgbClr val="272525"/>
-                </a:solidFill>
-                <a:latin typeface="Inter Bold" pitchFamily="34" charset="0"/>
-                <a:ea typeface="Inter Bold" pitchFamily="34" charset="-122"/>
-                <a:cs typeface="Inter Bold" pitchFamily="34" charset="-120"/>
-              </a:rPr>
-              <a:t>Мини‑приложение MAX</a:t>
-            </a:r>
-            <a:endParaRPr lang="en-US" sz="1900" dirty="0"/>
-          </a:p>
-        </p:txBody>
-      </p:sp>
-      <p:sp>
-        <p:nvSpPr>
-          <p:cNvPr id="13" name="Text 10"/>
-          <p:cNvSpPr/>
-          <p:nvPr/>
-        </p:nvSpPr>
-        <p:spPr>
-          <a:xfrm>
-            <a:off x="7420720" y="2512815"/>
-            <a:ext cx="1988798" cy="408604"/>
-          </a:xfrm>
-          <a:prstGeom prst="rect">
-            <a:avLst/>
-          </a:prstGeom>
-          <a:noFill/>
-          <a:ln/>
-        </p:spPr>
-        <p:txBody>
-          <a:bodyPr wrap="square" lIns="0" tIns="0" rIns="0" bIns="0" rtlCol="0" anchor="t">
-            <a:normAutofit/>
-          </a:bodyPr>
-          <a:lstStyle/>
-          <a:p>
-            <a:pPr marL="0" indent="0" algn="ctr">
-              <a:lnSpc>
-                <a:spcPct val="87000"/>
-              </a:lnSpc>
-              <a:buNone/>
-            </a:pPr>
-            <a:r>
-              <a:rPr lang="en-US" sz="1500" kern="0" spc="-34" dirty="0">
-                <a:solidFill>
-                  <a:srgbClr val="272525"/>
-                </a:solidFill>
-                <a:latin typeface="Inter" pitchFamily="34" charset="0"/>
-                <a:ea typeface="Inter" pitchFamily="34" charset="-122"/>
-                <a:cs typeface="Inter" pitchFamily="34" charset="-120"/>
-              </a:rPr>
-              <a:t>Ввод заявки и данных</a:t>
-            </a:r>
-            <a:endParaRPr lang="en-US" sz="1500" dirty="0"/>
           </a:p>
         </p:txBody>
       </p:sp>
